--- a/docs/customer-documents/federal-aan-series/federal-aan-conmon-gap-roadmap.pptx
+++ b/docs/customer-documents/federal-aan-series/federal-aan-conmon-gap-roadmap.pptx
@@ -511,8 +511,8 @@
           <a:p>
             <a:r>
               <a:rPr lang="en-US" dirty="0"/>
-              <a:t>Framing: this is the briefing companion to the Federal AAN / ConMon Compliance Gap Roadmap — the series' single source of truth for federal dates, scoped to FedRAMP Moderate throughout. The headline: the series is complete and the authorization package is ready for FedRAMP PMO submission. All nineteen parts are delivered as of July 5, 2026; the evaluation engine (ADR-111) is wired for all 29 FedRAMP 20x CR26 KSI rules with zero scaffold rules remaining; the OSCAL AP+AR+POA&amp;M bundle generates via uiao oscal bundle with 29/29 KSIs satisfied, zero open risks, and zero POA&amp;M items. The two working layers: the AAN series (Parts 1-19) provides the complete evidence and authorization layer for FedRAMP 20x continuous monitoring, and the Conformance Adapter / OSCAL Emitter framework provides the evidence governance layer — tracking which evidence closes which control, generating machine-readable KSI packages, and feeding the automated ConMon gate. Caveat to voice: internal working artifact, not an authorization package; claims advisory pending formal ATO review. Date Code identifies this version; newest code wins.
-Vendor sources: https://www.fedramp.gov/20x/ | uiao repo: inbox/Application Aware Networking/federal-aan-conmon-gap-roadmap.md</a:t>
+              <a:t>Framing: this is the briefing companion to the Federal AAN / ConMon Compliance Gap Roadmap — the series' single source of truth for federal dates, scoped to FedRAMP Moderate throughout. The headline: the series is complete and the authorization package is ready for FedRAMP PMO submission. All nineteen parts are delivered as of July 5, 2026; the evaluation engine (ADR-111) is wired for all 29 FedRAMP 20x CR26 KSI rules with zero scaffold rules remaining; the OSCAL AP+AR+POA&amp;M bundle generates via &lt;engine&gt; oscal bundle with 29/29 KSIs satisfied, zero open risks, and zero POA&amp;M items. The two working layers: the AAN series (Parts 1-19) provides the complete evidence and authorization layer for FedRAMP 20x continuous monitoring, and the Conformance Adapter / OSCAL Emitter framework provides the evidence governance layer — tracking which evidence closes which control, generating machine-readable KSI packages, and feeding the automated ConMon gate. Caveat to voice: internal working artifact, not an authorization package; claims advisory pending formal ATO review. Date Code identifies this version; newest code wins.
+Vendor sources: https://www.fedramp.gov/20x/ | host repo: docs/customer-documents/federal-aan-series/federal-aan-conmon-gap-roadmap.md</a:t>
             </a:r>
             <a:endParaRPr lang="en-US" dirty="0"/>
           </a:p>
@@ -601,7 +601,7 @@
             <a:r>
               <a:rPr lang="en-US" dirty="0"/>
               <a:t>The closing asks, each with its date. (1) Submit the package: the OSCAL bundle is committed at 29/29 KSIs satisfied with zero open risks and zero POA&amp;M items — the Class B/C window opens August 31, 2026, and the decision to submit belongs to leadership; everything technical is done. (2) File the VDR/VER artifacts with CISA by the December 7, 2026 hard deadline — the machine-readable SBOM plus vendor disclosure that the Part 15 pipeline (Syft, Grype, OpenVEX) produces and Book 19's procedure documents. (3) Map the Release 5.2.0 controls — SA-15(13), SA-24, SI-2(7) — into the Parts 11/15 closure tables before FedRAMP incorporates the deltas into baselines; this is the roadmap's one tracked gap. (4) Check the crypto estate against two clocks: September 21, 2026, when FIPS 140-2-only validated modules lose new-procurement standing (verify 140-3 tracking), and the longer M-23-02 arc — annual crypto inventories feeding the 2030 deprecation and 2035 prohibition of quantum-vulnerable cryptography. Close: the series is complete, the package is ready, and every remaining clock is external. The roadmap document is the single source of truth for federal dates — researched and verified July 7, 2026 — and carries a Date Code; newest code wins. All scoped to FedRAMP Moderate.
-Vendor sources: https://www.fedramp.gov/20x/ | https://www.cisa.gov/news-events/directives/bod-26-04-prioritizing-security-updates-based-risk | uiao repo: inbox/Application Aware Networking/federal-aan-conmon-gap-roadmap.md</a:t>
+Vendor sources: https://www.fedramp.gov/20x/ | https://www.cisa.gov/news-events/directives/bod-26-04-prioritizing-security-updates-based-risk | host repo: docs/customer-documents/federal-aan-series/federal-aan-conmon-gap-roadmap.md</a:t>
             </a:r>
             <a:endParaRPr lang="en-US" dirty="0"/>
           </a:p>
@@ -690,7 +690,7 @@
             <a:r>
               <a:rPr lang="en-US" dirty="0"/>
               <a:t>Build sequence slide 1 of 3 — the federal compliance timeline, researched and verified 2026-07-07. Build 1 of 3 — the elapsed baseline: mandates whose deadlines have already passed and whose posture must therefore be evidence-backed today. NIST SP 800-53 Rev 5 has been the current catalog since Rev 4's withdrawal in September 2021 — everything in the series maps to it at the Moderate baseline. M-21-31's event-logging maturity tiers completed in August 2023 (EL1 August 2022, EL2 February 2023, EL3 full) — the AU-family evidence Parts 13 and 19 carry. M-21-07's IPv6 milestones ran 20% IPv6-only in FY2023 to 80% in FY2025 — an IPAM question, Part 1's plane. M-22-09's Zero Trust goals came due at the end of FY2024 and the memo was NOT superseded — M-24-14 (July 2024) and M-25-04 (January 2025) direct continued maturation, and FISMA/CDM metrics still measure against it: phishing-resistant MFA and application-layer enforcement are Parts 3 and 5. BOD 25-01's SCuBA sequence completed June 20, 2025 — the KSI-001..010 surface the ScubaDrift pipeline now attests with per-policy dispositions. And NIST 800-53 Release 5.2.0 (August 27, 2025) added SA-15(13), SA-24, and SI-2(7) under EO 14306's patch-security push — the one tracked gap: the series' Parts 11/15 closure tables predate these and must map them before the next annual assessment. Also in the elapsed set (in the roadmap's full table): BOD 18-01 DMARC/HTTPS, BOD 22-01 KEV, BOD 23-01 asset visibility, M-23-02's annual crypto inventories, FIPS 203/204/205 (August 2024), and the Kari's Law / RAY BAUM'S Act telecom pair Part 6 owns.
-Vendor sources: https://www.fedramp.gov/20x/ | https://www.cisa.gov/news-events/directives/bod-26-04-prioritizing-security-updates-based-risk | https://csrc.nist.gov/News/2025/nist-releases-revision-to-sp-800-53-controls | uiao repo: inbox/Application Aware Networking/federal-aan-conmon-gap-roadmap.md</a:t>
+Vendor sources: https://www.fedramp.gov/20x/ | https://www.cisa.gov/news-events/directives/bod-26-04-prioritizing-security-updates-based-risk | https://csrc.nist.gov/News/2025/nist-releases-revision-to-sp-800-53-controls | host repo: docs/customer-documents/federal-aan-series/federal-aan-conmon-gap-roadmap.md</a:t>
             </a:r>
             <a:endParaRPr lang="en-US" dirty="0"/>
           </a:p>
@@ -779,7 +779,7 @@
             <a:r>
               <a:rPr lang="en-US" dirty="0"/>
               <a:t>Build sequence slide 2 of 3 — the federal compliance timeline, researched and verified 2026-07-07. Build 2 of 3 — the active window, all verified 2026-07-07 against fedramp.gov and cisa.gov. June: BOD 26-04 issued June 10 (risk-based vulnerability prioritization on a four-variable model — public exposure, KEV listing, exploit automatability, technical impact — with remediation timelines from 3 days to deferral, replacing flat CVSS windows), and the FedRAMP Consolidated Rules for 2026 published June 25, taking 20x out of pilot. July: marketplace listings opened July 6 for CSPs entering initial implementation; FedRAMP Ready went legacy July 28. August: Class A opens August 3; the temporary Rev5 Program Certification pipelines (Ready-conversion and lost-sponsor paths for Class B/C) open August 10; Class B and C open August 31 — SSA's GCC Moderate window, and the roadmap's Phase 7 submission target; and August 7 is BOD 26-04's first gate — agency vulnerability-management policies must support ongoing risk-based remediation (Part 11's framework). September 21: every FIPS 140-2 certificate moves to NIST's Historical List — no new procurement reliance on 140-2-only validated modules; verify cryptographic modules are FIPS 140-3 tracked (SC-13; Parts 3 and 12). December 7: the double gate — BOD 26-04's remediation timelines take force AND FedRAMP's VDR/VER rules become mandatory: machine-readable SBOM plus vendor disclosure, which is exactly what the Part 15 pipeline (Syft, Grype, OpenVEX) produces and Book 19's submission procedure documents. KSI-011 through 014 become evaluable on that contract.
-Vendor sources: https://www.fedramp.gov/20x/ | https://www.cisa.gov/news-events/directives/bod-26-04-prioritizing-security-updates-based-risk | https://csrc.nist.gov/News/2025/nist-releases-revision-to-sp-800-53-controls | uiao repo: inbox/Application Aware Networking/federal-aan-conmon-gap-roadmap.md</a:t>
+Vendor sources: https://www.fedramp.gov/20x/ | https://www.cisa.gov/news-events/directives/bod-26-04-prioritizing-security-updates-based-risk | https://csrc.nist.gov/News/2025/nist-releases-revision-to-sp-800-53-controls | host repo: docs/customer-documents/federal-aan-series/federal-aan-conmon-gap-roadmap.md</a:t>
             </a:r>
             <a:endParaRPr lang="en-US" dirty="0"/>
           </a:p>
@@ -868,7 +868,7 @@
             <a:r>
               <a:rPr lang="en-US" dirty="0"/>
               <a:t>Build sequence slide 3 of 3 — the federal compliance timeline, researched and verified 2026-07-07. Build 3 of 3 — the horizon. January 1, 2027 is the hinge: the Consolidated Rules become mandatory for all FedRAMP systems — all ConMon evidence in machine-readable KSI format, the legacy Rev 5 path closed for new authorizations — and, on the same day, CNSA 2.0's acquisition gate opens for National Security Systems (new NSS acquisitions must support ML-KEM-1024 key establishment and ML-DSA-87 signatures; NSS-scoped, but the civilian trajectory follows through M-23-02's inventory-and-migrate discipline). June 11, 2027: no new Rev5 certifications. Around August 2027: the next scheduled NIST 800-53 release on the announced two-year cadence from Release 5.2.0 — the roadmap tracks it because 5.2.0 already demonstrated that minor releases add controls. Then the long arc: 2030, quantum-vulnerable cryptography deprecated as a federal target; 2035, migration complete and quantum-vulnerable algorithms prohibited — the M-23-02/NSM-10 horizon that the annual crypto inventories (Parts 3 and 12) feed. Land the teal bar: FedRAMP 20x's demand for continuous, automated, machine-readable evidence maps exactly to what the series' active-governance control plane produces — the architectural transition IS the compliance posture. That is why the roadmap's status page reads 29/29 KSIs at high confidence.
-Vendor sources: https://www.fedramp.gov/20x/ | https://www.cisa.gov/news-events/directives/bod-26-04-prioritizing-security-updates-based-risk | https://csrc.nist.gov/News/2025/nist-releases-revision-to-sp-800-53-controls | uiao repo: inbox/Application Aware Networking/federal-aan-conmon-gap-roadmap.md</a:t>
+Vendor sources: https://www.fedramp.gov/20x/ | https://www.cisa.gov/news-events/directives/bod-26-04-prioritizing-security-updates-based-risk | https://csrc.nist.gov/News/2025/nist-releases-revision-to-sp-800-53-controls | host repo: docs/customer-documents/federal-aan-series/federal-aan-conmon-gap-roadmap.md</a:t>
             </a:r>
             <a:endParaRPr lang="en-US" dirty="0"/>
           </a:p>
@@ -957,7 +957,7 @@
             <a:r>
               <a:rPr lang="en-US" dirty="0"/>
               <a:t>The roadmap's control-closure summary in three bands. Band one — the substrate and modernization tracks, Parts 1 and 5-9: 34 distinct controls, led by InfoBlox DDI's 16 (Part 1), the Entra ID / ZTNA / Active Governance track's 12 (Part 5), and SD-WAN/SASE/UC's 7 (Part 6), with the SQL Server authentication parts (7-8) adding IA-family depth and the database architecture part (9) adding SC/SI depth. Band two — Part 4's identity SSOT: AC-2, AC-2(1), PS-4, PS-5, IA-4, SI-12, the HR-driven lifecycle evidence binding to slot-01. Band three — the operations and governance sweep, Parts 10-19, roughly 72+ additional controls: privileged access (AC-5/6 family, IA-11), vulnerability management (RA-5, SI-2/5, CM-7 — now BOD 26-04-shaped), data protection (MP family, SC-12/13/17/28, AU-10), SIEM/XDR (AU-6/7/8/11, SI-4, IR-4/6/8), business continuity (CP family), supply chain (SR family plus the BOD 26-04 VER framework), program management (PM family incl. PM-30 SCRM charter), PII processing (PT family), training (AT family), and Part 19's authorization package closing the CA family itself (CA-2/5/6/7, RA-3, SA-15). Land the red bar: the one tracked gap is Release 5.2.0's three new controls — SA-15(13), SA-24, SI-2(7) — which postdate the Parts 11/15 closure tables. Map them before the next annual assessment.
-Vendor sources: https://csrc.nist.gov/News/2025/nist-releases-revision-to-sp-800-53-controls | uiao repo: inbox/Application Aware Networking/federal-aan-conmon-gap-roadmap.md</a:t>
+Vendor sources: https://csrc.nist.gov/News/2025/nist-releases-revision-to-sp-800-53-controls | host repo: docs/customer-documents/federal-aan-series/federal-aan-conmon-gap-roadmap.md</a:t>
             </a:r>
             <a:endParaRPr lang="en-US" dirty="0"/>
           </a:p>
@@ -1046,7 +1046,7 @@
             <a:r>
               <a:rPr lang="en-US" dirty="0"/>
               <a:t>The evidence machine — the Conformance Adapter's eight surface slots, all bound. Walk the table briefly: slot-01 identity carries Parts 3, 4, 5, and 10 (KSI-IAM); slot-02 data carries Part 12; slot-03 network carries Parts 1, 2, and 6 (KSI-CNA and KSI-SVC — the Book 05 appendix's evidence contracts land here); slot-04 telemetry carries Parts 11-13; slot-05 endpoint Parts 2, 10, 11, 17; slot-06 security Parts 11, 13, 15, 16 (KSI-CMT and KSI-SCR — the BOD 26-04 VER framework); slot-07 continuity Part 14; slot-08 training Part 18, which closed the last scaffold (KSI-022, KSI-CED-RAT) on July 4, 2026. The right panel is the coverage arithmetic the series keeps insisting on: 10 of the 29 CR26 rules are attestable by ScuBA-based configuration tooling (KSI-001..010) — and as of July 5, 2026 those are no longer 'always satisfied' pass-throughs: the ScubaDrift disposition pipeline feeds per-policy results with dispositions (actionable_new_drift, lapsed_acceptance, governed_exception), POA&amp;M tickets, and expiry into the assessment results. The remaining 19 rules bind to evidence slots that exist only because the architecture in Parts 1-18 was built — conformance tooling measures drift from an intended state; it cannot author one. The authoritative rule-by-rule matrix lives in Book 00; Book 19 carries the evidence procedures.
-Vendor sources: https://www.cisa.gov/news-events/directives/bod-25-01-implementing-secure-practices-cloud-services | uiao repo: inbox/Application Aware Networking/federal-aan-conmon-gap-roadmap.md</a:t>
+Vendor sources: https://www.cisa.gov/news-events/directives/bod-25-01-implementing-secure-practices-cloud-services | host repo: docs/customer-documents/federal-aan-series/federal-aan-conmon-gap-roadmap.md</a:t>
             </a:r>
             <a:endParaRPr lang="en-US" dirty="0"/>
           </a:p>
@@ -1135,7 +1135,7 @@
             <a:r>
               <a:rPr lang="en-US" dirty="0"/>
               <a:t>Added in the SSA review response. The review observed that the series' 'no alternate closure path' language could be misread as claiming a single vendor path — this slide is the standing correction. Closure necessity names MECHANISM CLASSES ('only port-based authentication closes IA-3' is a protocol claim, not a product claim); every product named in the series is a deployed example of its mechanism, and this table shows the FedRAMP-authorized alternatives per layer — six of the ten layers here, the full matrix (adding IdP, PAM, CLM, MDM) in the roadmap document itself. Two rows worth voicing: the HR system of record row — the provisioning pipeline is source-agnostic BY DESIGN, so substituting Workday or SuccessFactors changes only the middleware adapter and none of the doctrine (Book 04); and the SIEM row — detection content gets rewritten but the slot evidence contracts and OSCAL emitters are format-stable. The doctrine statement for leadership: multiple compliant paths exist before the agency chooses, exactly one after — the selected path becomes mandatory once chosen, because split implementations of a truth plane recreate the fragmented-truth problem the series exists to end. Also note what is deliberately NOT here: the NGTP procurement bid matrices (Vendor A-F) stay out of the architecture corpus — source-selection sensitive; this table answers the leadership question from public information. Verify every candidate's current authorization on the FedRAMP Marketplace at procurement time.
-Vendor sources: https://www.fedramp.gov/20x/ | uiao repo: inbox/Application Aware Networking/federal-aan-conmon-gap-roadmap.md</a:t>
+Vendor sources: https://www.fedramp.gov/20x/ | host repo: docs/customer-documents/federal-aan-series/federal-aan-conmon-gap-roadmap.md</a:t>
             </a:r>
             <a:endParaRPr lang="en-US" dirty="0"/>
           </a:p>
@@ -1224,7 +1224,7 @@
             <a:r>
               <a:rPr lang="en-US" dirty="0"/>
               <a:t>Added in the SSA review response — the adoption artifact the review correctly identified as the missing layer ('without governance clarity, any roadmap cannot be adopted'). The full document is federal-aan-governance-ownership-model; this slide is its shape. Three components: (1) the track ownership matrix — eighteen rows, one per series track, each with exactly one Accountable owner plus R/C/I; it answers the question the review found the agency repeatedly asking: Zero Trust is not a row because it is the doctrine every row implements; SCuBA ownership is the Part 11/13 rows (OIS accountable, CSI Team responsible for the ScubaDrift pipeline); compliance ownership is the Part 19 row, where the Authorizing Official is accountable and everyone else produces evidence. (2) The decision-rights register, D1 through D14 — every decision the series explicitly deferred to governance, each with exactly one decision owner: the DDI Path A/B choice, the Grid Admin accountability model, the RADIUS platform, the NAC binding validation, SD-WAN Manager hosting, TIC 3.0 Use Case E posture, the attribute authority map sign-off, leaver-automation go-live, standing gated-actuation approvals, MAB and ScubaDrift governed-exception approvals (both expiring), boundary-variance escalation, package submission, and vendor substitution within a mechanism class. (3) The go/no-go criteria — six gates protecting field offices and telework from enforcement-phase breakage, drawn from the monitor-before-enforce shape all the series rollouts share. The two-layer rule to voice: the series doctrine stays organization-free so it survives reorganizations; this model is the binding to the current org chart — and because Part 4 made the org chart data, a reorganization updates it by re-derivation. The amber ask: D0 — ratify the model itself; every assignment is a recommendation pending CIO Office / OIS ratification.
-Vendor sources: uiao repo: inbox/Application Aware Networking/federal-aan-conmon-gap-roadmap.md | https://www.fedramp.gov/20x/</a:t>
+Vendor sources: host repo: docs/customer-documents/federal-aan-series/federal-aan-conmon-gap-roadmap.md | https://www.fedramp.gov/20x/</a:t>
             </a:r>
             <a:endParaRPr lang="en-US" dirty="0"/>
           </a:p>
@@ -1312,8 +1312,8 @@
           <a:p>
             <a:r>
               <a:rPr lang="en-US" dirty="0"/>
-              <a:t>The phase ladder from the roadmap's sequenced implementation plan. Completed: Phases 0 through 4 landed by July 3 — Parts 1-17 delivered, the first seven evidence slots bound, the complete OSCAL AP+AR+POA&amp;M bundle generating, and every KSI theme covered by local rules. Phase 5 (July 4) delivered Part 18's training program, bound slot-08, and activated KSI-022 at high confidence — the last scaffold rule. Phase 6 (July 5) delivered Part 19: the authorization package structure (SSP, SAR, POA&amp;M, OSCAL bundle committed at 29/29 satisfied with zero open risks), the ScubaDrift disposition pipeline replacing the always-satisfied ScuBA guard, the BOD 26-04 VDR/VER submission procedure, and the CA-7 ConMon cadence. Open: Phase 7 — submission — is the amber-ringed action: the authorization package goes to the FedRAMP PMO in the Class B/C window that opens August 31, 2026; the BOD 26-04 VDR/VER artifacts (machine-readable SBOM from the Syft + Grype + OpenVEX pipeline) go to CISA by the December 7, 2026 hard deadline; the 20x ATO issues on the 29/29 assessment results. Phase 8 is the steady state: monthly uiao oscal bundle AR refresh, CISA ScuBA assessment, and POA&amp;M checks; quarterly KSI evidence-quality and training-completion reviews; semi-annual incident-response drill (Part 18) and contingency tabletop (Part 14); annual full KSI re-assessment and ATO renewal preparation.
-Vendor sources: https://www.fedramp.gov/20x/ | uiao repo: inbox/Application Aware Networking/federal-aan-conmon-gap-roadmap.md</a:t>
+              <a:t>The phase ladder from the roadmap's sequenced implementation plan. Completed: Phases 0 through 4 landed by July 3 — Parts 1-17 delivered, the first seven evidence slots bound, the complete OSCAL AP+AR+POA&amp;M bundle generating, and every KSI theme covered by local rules. Phase 5 (July 4) delivered Part 18's training program, bound slot-08, and activated KSI-022 at high confidence — the last scaffold rule. Phase 6 (July 5) delivered Part 19: the authorization package structure (SSP, SAR, POA&amp;M, OSCAL bundle committed at 29/29 satisfied with zero open risks), the ScubaDrift disposition pipeline replacing the always-satisfied ScuBA guard, the BOD 26-04 VDR/VER submission procedure, and the CA-7 ConMon cadence. Open: Phase 7 — submission — is the amber-ringed action: the authorization package goes to the FedRAMP PMO in the Class B/C window that opens August 31, 2026; the BOD 26-04 VDR/VER artifacts (machine-readable SBOM from the Syft + Grype + OpenVEX pipeline) go to CISA by the December 7, 2026 hard deadline; the 20x ATO issues on the 29/29 assessment results. Phase 8 is the steady state: monthly &lt;engine&gt; oscal bundle AR refresh, CISA ScuBA assessment, and POA&amp;M checks; quarterly KSI evidence-quality and training-completion reviews; semi-annual incident-response drill (Part 18) and contingency tabletop (Part 14); annual full KSI re-assessment and ATO renewal preparation.
+Vendor sources: https://www.fedramp.gov/20x/ | host repo: docs/customer-documents/federal-aan-series/federal-aan-conmon-gap-roadmap.md</a:t>
             </a:r>
             <a:endParaRPr lang="en-US" dirty="0"/>
           </a:p>
@@ -1829,6 +1829,10 @@
             <a:prstDash val="solid"/>
           </a:ln>
         </p:spPr>
+        <p:txBody>
+          <a:bodyPr/>
+          <a:p/>
+        </p:txBody>
       </p:sp>
       <p:sp>
         <p:nvSpPr>
@@ -1919,6 +1923,10 @@
             </a:outerShdw>
           </a:effectLst>
         </p:spPr>
+        <p:txBody>
+          <a:bodyPr/>
+          <a:p/>
+        </p:txBody>
       </p:sp>
       <p:sp>
         <p:nvSpPr>
@@ -2002,6 +2010,10 @@
             <a:prstDash val="solid"/>
           </a:ln>
         </p:spPr>
+        <p:txBody>
+          <a:bodyPr/>
+          <a:p/>
+        </p:txBody>
       </p:sp>
       <p:sp>
         <p:nvSpPr>
@@ -2124,6 +2136,10 @@
             <a:prstDash val="solid"/>
           </a:ln>
         </p:spPr>
+        <p:txBody>
+          <a:bodyPr/>
+          <a:p/>
+        </p:txBody>
       </p:sp>
       <p:sp>
         <p:nvSpPr>
@@ -2385,6 +2401,10 @@
             </a:outerShdw>
           </a:effectLst>
         </p:spPr>
+        <p:txBody>
+          <a:bodyPr/>
+          <a:p/>
+        </p:txBody>
       </p:sp>
       <p:sp>
         <p:nvSpPr>
@@ -2407,6 +2427,10 @@
           </a:solidFill>
           <a:ln/>
         </p:spPr>
+        <p:txBody>
+          <a:bodyPr/>
+          <a:p/>
+        </p:txBody>
       </p:sp>
       <p:sp>
         <p:nvSpPr>
@@ -2533,6 +2557,10 @@
             </a:outerShdw>
           </a:effectLst>
         </p:spPr>
+        <p:txBody>
+          <a:bodyPr/>
+          <a:p/>
+        </p:txBody>
       </p:sp>
       <p:sp>
         <p:nvSpPr>
@@ -2555,6 +2583,10 @@
           </a:solidFill>
           <a:ln/>
         </p:spPr>
+        <p:txBody>
+          <a:bodyPr/>
+          <a:p/>
+        </p:txBody>
       </p:sp>
       <p:sp>
         <p:nvSpPr>
@@ -2681,6 +2713,10 @@
             </a:outerShdw>
           </a:effectLst>
         </p:spPr>
+        <p:txBody>
+          <a:bodyPr/>
+          <a:p/>
+        </p:txBody>
       </p:sp>
       <p:sp>
         <p:nvSpPr>
@@ -2703,6 +2739,10 @@
           </a:solidFill>
           <a:ln/>
         </p:spPr>
+        <p:txBody>
+          <a:bodyPr/>
+          <a:p/>
+        </p:txBody>
       </p:sp>
       <p:sp>
         <p:nvSpPr>
@@ -2829,6 +2869,10 @@
             </a:outerShdw>
           </a:effectLst>
         </p:spPr>
+        <p:txBody>
+          <a:bodyPr/>
+          <a:p/>
+        </p:txBody>
       </p:sp>
       <p:sp>
         <p:nvSpPr>
@@ -2851,6 +2895,10 @@
           </a:solidFill>
           <a:ln/>
         </p:spPr>
+        <p:txBody>
+          <a:bodyPr/>
+          <a:p/>
+        </p:txBody>
       </p:sp>
       <p:sp>
         <p:nvSpPr>
@@ -2970,6 +3018,10 @@
             <a:prstDash val="solid"/>
           </a:ln>
         </p:spPr>
+        <p:txBody>
+          <a:bodyPr/>
+          <a:p/>
+        </p:txBody>
       </p:sp>
       <p:sp>
         <p:nvSpPr>
@@ -3231,6 +3283,10 @@
             </a:outerShdw>
           </a:effectLst>
         </p:spPr>
+        <p:txBody>
+          <a:bodyPr/>
+          <a:p/>
+        </p:txBody>
       </p:sp>
       <p:sp>
         <p:nvSpPr>
@@ -3265,6 +3321,10 @@
             </a:outerShdw>
           </a:effectLst>
         </p:spPr>
+        <p:txBody>
+          <a:bodyPr/>
+          <a:p/>
+        </p:txBody>
       </p:sp>
       <p:sp>
         <p:nvSpPr>
@@ -3328,6 +3388,10 @@
             <a:tailEnd type="triangle"/>
           </a:ln>
         </p:spPr>
+        <p:txBody>
+          <a:bodyPr/>
+          <a:p/>
+        </p:txBody>
       </p:sp>
       <p:sp>
         <p:nvSpPr>
@@ -3355,6 +3419,10 @@
             <a:prstDash val="solid"/>
           </a:ln>
         </p:spPr>
+        <p:txBody>
+          <a:bodyPr/>
+          <a:p/>
+        </p:txBody>
       </p:sp>
       <p:sp>
         <p:nvSpPr>
@@ -3418,6 +3486,10 @@
             <a:tailEnd type="triangle"/>
           </a:ln>
         </p:spPr>
+        <p:txBody>
+          <a:bodyPr/>
+          <a:p/>
+        </p:txBody>
       </p:sp>
       <p:sp>
         <p:nvSpPr>
@@ -3445,6 +3517,10 @@
             <a:prstDash val="solid"/>
           </a:ln>
         </p:spPr>
+        <p:txBody>
+          <a:bodyPr/>
+          <a:p/>
+        </p:txBody>
       </p:sp>
       <p:sp>
         <p:nvSpPr>
@@ -3504,6 +3580,10 @@
           </a:solidFill>
           <a:ln/>
         </p:spPr>
+        <p:txBody>
+          <a:bodyPr/>
+          <a:p/>
+        </p:txBody>
       </p:sp>
       <p:sp>
         <p:nvSpPr>
@@ -3577,6 +3657,10 @@
           </a:solidFill>
           <a:ln/>
         </p:spPr>
+        <p:txBody>
+          <a:bodyPr/>
+          <a:p/>
+        </p:txBody>
       </p:sp>
       <p:sp>
         <p:nvSpPr>
@@ -3650,6 +3734,10 @@
           </a:solidFill>
           <a:ln/>
         </p:spPr>
+        <p:txBody>
+          <a:bodyPr/>
+          <a:p/>
+        </p:txBody>
       </p:sp>
       <p:sp>
         <p:nvSpPr>
@@ -3723,6 +3811,10 @@
           </a:solidFill>
           <a:ln/>
         </p:spPr>
+        <p:txBody>
+          <a:bodyPr/>
+          <a:p/>
+        </p:txBody>
       </p:sp>
       <p:sp>
         <p:nvSpPr>
@@ -3796,6 +3888,10 @@
           </a:solidFill>
           <a:ln/>
         </p:spPr>
+        <p:txBody>
+          <a:bodyPr/>
+          <a:p/>
+        </p:txBody>
       </p:sp>
       <p:sp>
         <p:nvSpPr>
@@ -3869,6 +3965,10 @@
           </a:solidFill>
           <a:ln/>
         </p:spPr>
+        <p:txBody>
+          <a:bodyPr/>
+          <a:p/>
+        </p:txBody>
       </p:sp>
       <p:sp>
         <p:nvSpPr>
@@ -3949,6 +4049,10 @@
             <a:prstDash val="solid"/>
           </a:ln>
         </p:spPr>
+        <p:txBody>
+          <a:bodyPr/>
+          <a:p/>
+        </p:txBody>
       </p:sp>
       <p:sp>
         <p:nvSpPr>
@@ -4203,6 +4307,10 @@
             <a:prstDash val="solid"/>
           </a:ln>
         </p:spPr>
+        <p:txBody>
+          <a:bodyPr/>
+          <a:p/>
+        </p:txBody>
       </p:sp>
       <p:sp>
         <p:nvSpPr>
@@ -4266,6 +4374,10 @@
             <a:tailEnd type="triangle"/>
           </a:ln>
         </p:spPr>
+        <p:txBody>
+          <a:bodyPr/>
+          <a:p/>
+        </p:txBody>
       </p:sp>
       <p:sp>
         <p:nvSpPr>
@@ -4300,6 +4412,10 @@
             </a:outerShdw>
           </a:effectLst>
         </p:spPr>
+        <p:txBody>
+          <a:bodyPr/>
+          <a:p/>
+        </p:txBody>
       </p:sp>
       <p:sp>
         <p:nvSpPr>
@@ -4334,6 +4450,10 @@
             </a:outerShdw>
           </a:effectLst>
         </p:spPr>
+        <p:txBody>
+          <a:bodyPr/>
+          <a:p/>
+        </p:txBody>
       </p:sp>
       <p:sp>
         <p:nvSpPr>
@@ -4397,6 +4517,10 @@
             <a:tailEnd type="triangle"/>
           </a:ln>
         </p:spPr>
+        <p:txBody>
+          <a:bodyPr/>
+          <a:p/>
+        </p:txBody>
       </p:sp>
       <p:sp>
         <p:nvSpPr>
@@ -4424,6 +4548,10 @@
             <a:prstDash val="solid"/>
           </a:ln>
         </p:spPr>
+        <p:txBody>
+          <a:bodyPr/>
+          <a:p/>
+        </p:txBody>
       </p:sp>
       <p:sp>
         <p:nvSpPr>
@@ -4483,6 +4611,10 @@
           </a:solidFill>
           <a:ln/>
         </p:spPr>
+        <p:txBody>
+          <a:bodyPr/>
+          <a:p/>
+        </p:txBody>
       </p:sp>
       <p:sp>
         <p:nvSpPr>
@@ -4556,6 +4688,10 @@
           </a:solidFill>
           <a:ln/>
         </p:spPr>
+        <p:txBody>
+          <a:bodyPr/>
+          <a:p/>
+        </p:txBody>
       </p:sp>
       <p:sp>
         <p:nvSpPr>
@@ -4629,6 +4765,10 @@
           </a:solidFill>
           <a:ln/>
         </p:spPr>
+        <p:txBody>
+          <a:bodyPr/>
+          <a:p/>
+        </p:txBody>
       </p:sp>
       <p:sp>
         <p:nvSpPr>
@@ -4702,6 +4842,10 @@
           </a:solidFill>
           <a:ln/>
         </p:spPr>
+        <p:txBody>
+          <a:bodyPr/>
+          <a:p/>
+        </p:txBody>
       </p:sp>
       <p:sp>
         <p:nvSpPr>
@@ -4775,6 +4919,10 @@
           </a:solidFill>
           <a:ln/>
         </p:spPr>
+        <p:txBody>
+          <a:bodyPr/>
+          <a:p/>
+        </p:txBody>
       </p:sp>
       <p:sp>
         <p:nvSpPr>
@@ -4848,6 +4996,10 @@
           </a:solidFill>
           <a:ln/>
         </p:spPr>
+        <p:txBody>
+          <a:bodyPr/>
+          <a:p/>
+        </p:txBody>
       </p:sp>
       <p:sp>
         <p:nvSpPr>
@@ -4928,6 +5080,10 @@
             <a:prstDash val="solid"/>
           </a:ln>
         </p:spPr>
+        <p:txBody>
+          <a:bodyPr/>
+          <a:p/>
+        </p:txBody>
       </p:sp>
       <p:sp>
         <p:nvSpPr>
@@ -5182,6 +5338,10 @@
             <a:prstDash val="solid"/>
           </a:ln>
         </p:spPr>
+        <p:txBody>
+          <a:bodyPr/>
+          <a:p/>
+        </p:txBody>
       </p:sp>
       <p:sp>
         <p:nvSpPr>
@@ -5245,6 +5405,10 @@
             <a:tailEnd type="triangle"/>
           </a:ln>
         </p:spPr>
+        <p:txBody>
+          <a:bodyPr/>
+          <a:p/>
+        </p:txBody>
       </p:sp>
       <p:sp>
         <p:nvSpPr>
@@ -5272,6 +5436,10 @@
             <a:prstDash val="solid"/>
           </a:ln>
         </p:spPr>
+        <p:txBody>
+          <a:bodyPr/>
+          <a:p/>
+        </p:txBody>
       </p:sp>
       <p:sp>
         <p:nvSpPr>
@@ -5335,6 +5503,10 @@
             <a:tailEnd type="triangle"/>
           </a:ln>
         </p:spPr>
+        <p:txBody>
+          <a:bodyPr/>
+          <a:p/>
+        </p:txBody>
       </p:sp>
       <p:sp>
         <p:nvSpPr>
@@ -5369,6 +5541,10 @@
             </a:outerShdw>
           </a:effectLst>
         </p:spPr>
+        <p:txBody>
+          <a:bodyPr/>
+          <a:p/>
+        </p:txBody>
       </p:sp>
       <p:sp>
         <p:nvSpPr>
@@ -5403,6 +5579,10 @@
             </a:outerShdw>
           </a:effectLst>
         </p:spPr>
+        <p:txBody>
+          <a:bodyPr/>
+          <a:p/>
+        </p:txBody>
       </p:sp>
       <p:sp>
         <p:nvSpPr>
@@ -5462,6 +5642,10 @@
           </a:solidFill>
           <a:ln/>
         </p:spPr>
+        <p:txBody>
+          <a:bodyPr/>
+          <a:p/>
+        </p:txBody>
       </p:sp>
       <p:sp>
         <p:nvSpPr>
@@ -5535,6 +5719,10 @@
           </a:solidFill>
           <a:ln/>
         </p:spPr>
+        <p:txBody>
+          <a:bodyPr/>
+          <a:p/>
+        </p:txBody>
       </p:sp>
       <p:sp>
         <p:nvSpPr>
@@ -5608,6 +5796,10 @@
           </a:solidFill>
           <a:ln/>
         </p:spPr>
+        <p:txBody>
+          <a:bodyPr/>
+          <a:p/>
+        </p:txBody>
       </p:sp>
       <p:sp>
         <p:nvSpPr>
@@ -5681,6 +5873,10 @@
           </a:solidFill>
           <a:ln/>
         </p:spPr>
+        <p:txBody>
+          <a:bodyPr/>
+          <a:p/>
+        </p:txBody>
       </p:sp>
       <p:sp>
         <p:nvSpPr>
@@ -5754,6 +5950,10 @@
           </a:solidFill>
           <a:ln/>
         </p:spPr>
+        <p:txBody>
+          <a:bodyPr/>
+          <a:p/>
+        </p:txBody>
       </p:sp>
       <p:sp>
         <p:nvSpPr>
@@ -5827,6 +6027,10 @@
           </a:solidFill>
           <a:ln/>
         </p:spPr>
+        <p:txBody>
+          <a:bodyPr/>
+          <a:p/>
+        </p:txBody>
       </p:sp>
       <p:sp>
         <p:nvSpPr>
@@ -5907,6 +6111,10 @@
             <a:prstDash val="solid"/>
           </a:ln>
         </p:spPr>
+        <p:txBody>
+          <a:bodyPr/>
+          <a:p/>
+        </p:txBody>
       </p:sp>
       <p:sp>
         <p:nvSpPr>
@@ -6168,6 +6376,10 @@
             </a:outerShdw>
           </a:effectLst>
         </p:spPr>
+        <p:txBody>
+          <a:bodyPr/>
+          <a:p/>
+        </p:txBody>
       </p:sp>
       <p:sp>
         <p:nvSpPr>
@@ -6190,6 +6402,10 @@
           </a:solidFill>
           <a:ln/>
         </p:spPr>
+        <p:txBody>
+          <a:bodyPr/>
+          <a:p/>
+        </p:txBody>
       </p:sp>
       <p:sp>
         <p:nvSpPr>
@@ -6319,6 +6535,10 @@
             </a:outerShdw>
           </a:effectLst>
         </p:spPr>
+        <p:txBody>
+          <a:bodyPr/>
+          <a:p/>
+        </p:txBody>
       </p:sp>
       <p:sp>
         <p:nvSpPr>
@@ -6341,6 +6561,10 @@
           </a:solidFill>
           <a:ln/>
         </p:spPr>
+        <p:txBody>
+          <a:bodyPr/>
+          <a:p/>
+        </p:txBody>
       </p:sp>
       <p:sp>
         <p:nvSpPr>
@@ -6470,6 +6694,10 @@
             </a:outerShdw>
           </a:effectLst>
         </p:spPr>
+        <p:txBody>
+          <a:bodyPr/>
+          <a:p/>
+        </p:txBody>
       </p:sp>
       <p:sp>
         <p:nvSpPr>
@@ -6492,6 +6720,10 @@
           </a:solidFill>
           <a:ln/>
         </p:spPr>
+        <p:txBody>
+          <a:bodyPr/>
+          <a:p/>
+        </p:txBody>
       </p:sp>
       <p:sp>
         <p:nvSpPr>
@@ -6614,6 +6846,10 @@
             <a:prstDash val="solid"/>
           </a:ln>
         </p:spPr>
+        <p:txBody>
+          <a:bodyPr/>
+          <a:p/>
+        </p:txBody>
       </p:sp>
       <p:sp>
         <p:nvSpPr>
@@ -8760,6 +8996,10 @@
             </a:outerShdw>
           </a:effectLst>
         </p:spPr>
+        <p:txBody>
+          <a:bodyPr/>
+          <a:p/>
+        </p:txBody>
       </p:sp>
       <p:sp>
         <p:nvSpPr>
@@ -8916,6 +9156,10 @@
             <a:prstDash val="solid"/>
           </a:ln>
         </p:spPr>
+        <p:txBody>
+          <a:bodyPr/>
+          <a:p/>
+        </p:txBody>
       </p:sp>
       <p:sp>
         <p:nvSpPr>
@@ -10643,6 +10887,10 @@
             <a:prstDash val="solid"/>
           </a:ln>
         </p:spPr>
+        <p:txBody>
+          <a:bodyPr/>
+          <a:p/>
+        </p:txBody>
       </p:sp>
       <p:sp>
         <p:nvSpPr>
@@ -10918,6 +11166,10 @@
             </a:outerShdw>
           </a:effectLst>
         </p:spPr>
+        <p:txBody>
+          <a:bodyPr/>
+          <a:p/>
+        </p:txBody>
       </p:sp>
       <p:sp>
         <p:nvSpPr>
@@ -10940,6 +11192,10 @@
           </a:solidFill>
           <a:ln/>
         </p:spPr>
+        <p:txBody>
+          <a:bodyPr/>
+          <a:p/>
+        </p:txBody>
       </p:sp>
       <p:sp>
         <p:nvSpPr>
@@ -11052,6 +11308,10 @@
             </a:outerShdw>
           </a:effectLst>
         </p:spPr>
+        <p:txBody>
+          <a:bodyPr/>
+          <a:p/>
+        </p:txBody>
       </p:sp>
       <p:sp>
         <p:nvSpPr>
@@ -11074,6 +11334,10 @@
           </a:solidFill>
           <a:ln/>
         </p:spPr>
+        <p:txBody>
+          <a:bodyPr/>
+          <a:p/>
+        </p:txBody>
       </p:sp>
       <p:sp>
         <p:nvSpPr>
@@ -11186,6 +11450,10 @@
             </a:outerShdw>
           </a:effectLst>
         </p:spPr>
+        <p:txBody>
+          <a:bodyPr/>
+          <a:p/>
+        </p:txBody>
       </p:sp>
       <p:sp>
         <p:nvSpPr>
@@ -11208,6 +11476,10 @@
           </a:solidFill>
           <a:ln/>
         </p:spPr>
+        <p:txBody>
+          <a:bodyPr/>
+          <a:p/>
+        </p:txBody>
       </p:sp>
       <p:sp>
         <p:nvSpPr>
@@ -11320,6 +11592,10 @@
             </a:outerShdw>
           </a:effectLst>
         </p:spPr>
+        <p:txBody>
+          <a:bodyPr/>
+          <a:p/>
+        </p:txBody>
       </p:sp>
       <p:sp>
         <p:nvSpPr>
@@ -11588,6 +11864,10 @@
             <a:prstDash val="solid"/>
           </a:ln>
         </p:spPr>
+        <p:txBody>
+          <a:bodyPr/>
+          <a:p/>
+        </p:txBody>
       </p:sp>
       <p:sp>
         <p:nvSpPr>
@@ -11693,6 +11973,10 @@
             <a:prstDash val="solid"/>
           </a:ln>
         </p:spPr>
+        <p:txBody>
+          <a:bodyPr/>
+          <a:p/>
+        </p:txBody>
       </p:sp>
       <p:sp>
         <p:nvSpPr>
@@ -11798,6 +12082,10 @@
             <a:prstDash val="solid"/>
           </a:ln>
         </p:spPr>
+        <p:txBody>
+          <a:bodyPr/>
+          <a:p/>
+        </p:txBody>
       </p:sp>
       <p:sp>
         <p:nvSpPr>
@@ -11910,6 +12198,10 @@
             </a:outerShdw>
           </a:effectLst>
         </p:spPr>
+        <p:txBody>
+          <a:bodyPr/>
+          <a:p/>
+        </p:txBody>
       </p:sp>
       <p:sp>
         <p:nvSpPr>
@@ -11944,6 +12236,10 @@
             </a:outerShdw>
           </a:effectLst>
         </p:spPr>
+        <p:txBody>
+          <a:bodyPr/>
+          <a:p/>
+        </p:txBody>
       </p:sp>
       <p:sp>
         <p:nvSpPr>
@@ -12024,6 +12320,10 @@
             <a:prstDash val="solid"/>
           </a:ln>
         </p:spPr>
+        <p:txBody>
+          <a:bodyPr/>
+          <a:p/>
+        </p:txBody>
       </p:sp>
       <p:sp>
         <p:nvSpPr>
